--- a/sample-app/fortune-cookies.pptx
+++ b/sample-app/fortune-cookies.pptx
@@ -15616,12 +15616,8 @@
           <a:lstStyle/>
           <a:p>
             <a:r>
-              <a:rPr lang="en-US" dirty="0" err="1"/>
-              <a:t>Bulletinboard</a:t>
-            </a:r>
-            <a:r>
-              <a:rPr lang="en-US" dirty="0"/>
-              <a:t> in K8s: Target picture overall</a:t>
+              <a:rPr lang="en-US" dirty="0"/>
+              <a:t>Fortune Cookies in K8s: Target picture overall</a:t>
             </a:r>
           </a:p>
         </p:txBody>

--- a/sample-app/fortune-cookies.pptx
+++ b/sample-app/fortune-cookies.pptx
@@ -243,7 +243,7 @@
             <a:fld id="{47855BD9-AF71-426C-9B9B-B0E52B88852E}" type="slidenum">
               <a:rPr lang="de-DE" sz="3000"/>
               <a:pPr algn="ctr"/>
-              <a:t>‹Nr.›</a:t>
+              <a:t>‹#›</a:t>
             </a:fld>
             <a:endParaRPr lang="de-DE" sz="3000" dirty="0"/>
           </a:p>
@@ -392,7 +392,7 @@
             <a:fld id="{7D8C2C35-2B8A-446E-BEC0-FD36716C29AC}" type="slidenum">
               <a:rPr lang="de-DE" smtClean="0"/>
               <a:pPr/>
-              <a:t>‹Nr.›</a:t>
+              <a:t>‹#›</a:t>
             </a:fld>
             <a:endParaRPr lang="de-DE" dirty="0"/>
           </a:p>
@@ -4152,7 +4152,7 @@
               <a:pPr marL="0" lvl="0" indent="0" algn="r">
                 <a:buNone/>
               </a:pPr>
-              <a:t>‹Nr.›</a:t>
+              <a:t>‹#›</a:t>
             </a:fld>
             <a:endParaRPr lang="en-US" sz="900" noProof="0" dirty="0"/>
           </a:p>
@@ -4895,7 +4895,7 @@
               <a:pPr marL="0" lvl="0" indent="0" algn="r">
                 <a:buNone/>
               </a:pPr>
-              <a:t>‹Nr.›</a:t>
+              <a:t>‹#›</a:t>
             </a:fld>
             <a:endParaRPr lang="en-US" sz="900" noProof="0" dirty="0"/>
           </a:p>
@@ -14417,7 +14417,7 @@
               <a:pPr marL="0" lvl="0" indent="0" algn="r">
                 <a:buNone/>
               </a:pPr>
-              <a:t>‹Nr.›</a:t>
+              <a:t>‹#›</a:t>
             </a:fld>
             <a:endParaRPr lang="en-US" sz="900" noProof="0" dirty="0"/>
           </a:p>
@@ -15539,7 +15539,9 @@
             <a:ext cx="4534794" cy="5231504"/>
           </a:xfrm>
           <a:prstGeom prst="roundRect">
-            <a:avLst/>
+            <a:avLst>
+              <a:gd name="adj" fmla="val 0"/>
+            </a:avLst>
           </a:prstGeom>
           <a:solidFill>
             <a:schemeClr val="bg1">
@@ -15658,261 +15660,6 @@
           </a:prstGeom>
         </p:spPr>
       </p:pic>
-      <p:sp>
-        <p:nvSpPr>
-          <p:cNvPr id="6" name="Textfeld 5">
-            <a:extLst>
-              <a:ext uri="{FF2B5EF4-FFF2-40B4-BE49-F238E27FC236}">
-                <a16:creationId xmlns:a16="http://schemas.microsoft.com/office/drawing/2014/main" id="{F94C2424-9F31-C8E5-0703-24634A4AEDEB}"/>
-              </a:ext>
-            </a:extLst>
-          </p:cNvPr>
-          <p:cNvSpPr txBox="1"/>
-          <p:nvPr/>
-        </p:nvSpPr>
-        <p:spPr>
-          <a:xfrm>
-            <a:off x="344210" y="2997272"/>
-            <a:ext cx="6311118" cy="1200329"/>
-          </a:xfrm>
-          <a:prstGeom prst="rect">
-            <a:avLst/>
-          </a:prstGeom>
-          <a:noFill/>
-        </p:spPr>
-        <p:txBody>
-          <a:bodyPr wrap="square" lIns="0" tIns="0" rIns="0" bIns="0" rtlCol="0">
-            <a:spAutoFit/>
-          </a:bodyPr>
-          <a:lstStyle/>
-          <a:p>
-            <a:pPr fontAlgn="base">
-              <a:spcBef>
-                <a:spcPct val="50000"/>
-              </a:spcBef>
-              <a:spcAft>
-                <a:spcPct val="0"/>
-              </a:spcAft>
-              <a:buClr>
-                <a:srgbClr val="F0AB00"/>
-              </a:buClr>
-              <a:buSzPct val="80000"/>
-            </a:pPr>
-            <a:r>
-              <a:rPr lang="de-DE" sz="1200" b="1" kern="0" dirty="0">
-                <a:latin typeface="Courier New" panose="02070309020205020404" pitchFamily="49" charset="0"/>
-                <a:ea typeface="Arial Unicode MS" pitchFamily="34" charset="-128"/>
-                <a:cs typeface="Courier New" panose="02070309020205020404" pitchFamily="49" charset="0"/>
-              </a:rPr>
-              <a:t>$&gt;: </a:t>
-            </a:r>
-            <a:r>
-              <a:rPr lang="de-DE" sz="1200" b="1" kern="0" dirty="0" err="1">
-                <a:latin typeface="Courier New" panose="02070309020205020404" pitchFamily="49" charset="0"/>
-                <a:ea typeface="Arial Unicode MS" pitchFamily="34" charset="-128"/>
-                <a:cs typeface="Courier New" panose="02070309020205020404" pitchFamily="49" charset="0"/>
-              </a:rPr>
-              <a:t>curl</a:t>
-            </a:r>
-            <a:r>
-              <a:rPr lang="de-DE" sz="1200" b="1" kern="0" dirty="0">
-                <a:latin typeface="Courier New" panose="02070309020205020404" pitchFamily="49" charset="0"/>
-                <a:ea typeface="Arial Unicode MS" pitchFamily="34" charset="-128"/>
-                <a:cs typeface="Courier New" panose="02070309020205020404" pitchFamily="49" charset="0"/>
-              </a:rPr>
-              <a:t> </a:t>
-            </a:r>
-            <a:r>
-              <a:rPr lang="de-DE" sz="1200" b="1" kern="0" dirty="0" err="1">
-                <a:latin typeface="Courier New" panose="02070309020205020404" pitchFamily="49" charset="0"/>
-                <a:ea typeface="Arial Unicode MS" pitchFamily="34" charset="-128"/>
-                <a:cs typeface="Courier New" panose="02070309020205020404" pitchFamily="49" charset="0"/>
-              </a:rPr>
-              <a:t>fortune-cookies.com</a:t>
-            </a:r>
-            <a:endParaRPr lang="de-DE" sz="1200" b="1" kern="0" dirty="0">
-              <a:latin typeface="Courier New" panose="02070309020205020404" pitchFamily="49" charset="0"/>
-              <a:ea typeface="Arial Unicode MS" pitchFamily="34" charset="-128"/>
-              <a:cs typeface="Courier New" panose="02070309020205020404" pitchFamily="49" charset="0"/>
-            </a:endParaRPr>
-          </a:p>
-          <a:p>
-            <a:pPr fontAlgn="base">
-              <a:spcBef>
-                <a:spcPct val="50000"/>
-              </a:spcBef>
-              <a:spcAft>
-                <a:spcPct val="0"/>
-              </a:spcAft>
-              <a:buClr>
-                <a:srgbClr val="F0AB00"/>
-              </a:buClr>
-              <a:buSzPct val="80000"/>
-            </a:pPr>
-            <a:endParaRPr lang="de-DE" sz="1200" kern="0" dirty="0">
-              <a:latin typeface="Courier New" panose="02070309020205020404" pitchFamily="49" charset="0"/>
-              <a:ea typeface="Arial Unicode MS" pitchFamily="34" charset="-128"/>
-              <a:cs typeface="Courier New" panose="02070309020205020404" pitchFamily="49" charset="0"/>
-            </a:endParaRPr>
-          </a:p>
-          <a:p>
-            <a:pPr fontAlgn="base">
-              <a:spcBef>
-                <a:spcPct val="50000"/>
-              </a:spcBef>
-              <a:spcAft>
-                <a:spcPct val="0"/>
-              </a:spcAft>
-              <a:buClr>
-                <a:srgbClr val="F0AB00"/>
-              </a:buClr>
-              <a:buSzPct val="80000"/>
-            </a:pPr>
-            <a:r>
-              <a:rPr lang="de-DE" sz="1200" kern="0" dirty="0">
-                <a:latin typeface="Courier New" panose="02070309020205020404" pitchFamily="49" charset="0"/>
-                <a:ea typeface="Arial Unicode MS" pitchFamily="34" charset="-128"/>
-                <a:cs typeface="Courier New" panose="02070309020205020404" pitchFamily="49" charset="0"/>
-              </a:rPr>
-              <a:t>UNIX was half a </a:t>
-            </a:r>
-            <a:r>
-              <a:rPr lang="de-DE" sz="1200" kern="0" dirty="0" err="1">
-                <a:latin typeface="Courier New" panose="02070309020205020404" pitchFamily="49" charset="0"/>
-                <a:ea typeface="Arial Unicode MS" pitchFamily="34" charset="-128"/>
-                <a:cs typeface="Courier New" panose="02070309020205020404" pitchFamily="49" charset="0"/>
-              </a:rPr>
-              <a:t>billion</a:t>
-            </a:r>
-            <a:r>
-              <a:rPr lang="de-DE" sz="1200" kern="0" dirty="0">
-                <a:latin typeface="Courier New" panose="02070309020205020404" pitchFamily="49" charset="0"/>
-                <a:ea typeface="Arial Unicode MS" pitchFamily="34" charset="-128"/>
-                <a:cs typeface="Courier New" panose="02070309020205020404" pitchFamily="49" charset="0"/>
-              </a:rPr>
-              <a:t> (500000000) </a:t>
-            </a:r>
-            <a:r>
-              <a:rPr lang="de-DE" sz="1200" kern="0" dirty="0" err="1">
-                <a:latin typeface="Courier New" panose="02070309020205020404" pitchFamily="49" charset="0"/>
-                <a:ea typeface="Arial Unicode MS" pitchFamily="34" charset="-128"/>
-                <a:cs typeface="Courier New" panose="02070309020205020404" pitchFamily="49" charset="0"/>
-              </a:rPr>
-              <a:t>seconds</a:t>
-            </a:r>
-            <a:r>
-              <a:rPr lang="de-DE" sz="1200" kern="0" dirty="0">
-                <a:latin typeface="Courier New" panose="02070309020205020404" pitchFamily="49" charset="0"/>
-                <a:ea typeface="Arial Unicode MS" pitchFamily="34" charset="-128"/>
-                <a:cs typeface="Courier New" panose="02070309020205020404" pitchFamily="49" charset="0"/>
-              </a:rPr>
-              <a:t> </a:t>
-            </a:r>
-            <a:r>
-              <a:rPr lang="de-DE" sz="1200" kern="0" dirty="0" err="1">
-                <a:latin typeface="Courier New" panose="02070309020205020404" pitchFamily="49" charset="0"/>
-                <a:ea typeface="Arial Unicode MS" pitchFamily="34" charset="-128"/>
-                <a:cs typeface="Courier New" panose="02070309020205020404" pitchFamily="49" charset="0"/>
-              </a:rPr>
-              <a:t>old</a:t>
-            </a:r>
-            <a:r>
-              <a:rPr lang="de-DE" sz="1200" kern="0" dirty="0">
-                <a:latin typeface="Courier New" panose="02070309020205020404" pitchFamily="49" charset="0"/>
-                <a:ea typeface="Arial Unicode MS" pitchFamily="34" charset="-128"/>
-                <a:cs typeface="Courier New" panose="02070309020205020404" pitchFamily="49" charset="0"/>
-              </a:rPr>
-              <a:t> on Tue Nov  5 00:53:20 1985 GMT (</a:t>
-            </a:r>
-            <a:r>
-              <a:rPr lang="de-DE" sz="1200" kern="0" dirty="0" err="1">
-                <a:latin typeface="Courier New" panose="02070309020205020404" pitchFamily="49" charset="0"/>
-                <a:ea typeface="Arial Unicode MS" pitchFamily="34" charset="-128"/>
-                <a:cs typeface="Courier New" panose="02070309020205020404" pitchFamily="49" charset="0"/>
-              </a:rPr>
-              <a:t>measuring</a:t>
-            </a:r>
-            <a:r>
-              <a:rPr lang="de-DE" sz="1200" kern="0" dirty="0">
-                <a:latin typeface="Courier New" panose="02070309020205020404" pitchFamily="49" charset="0"/>
-                <a:ea typeface="Arial Unicode MS" pitchFamily="34" charset="-128"/>
-                <a:cs typeface="Courier New" panose="02070309020205020404" pitchFamily="49" charset="0"/>
-              </a:rPr>
-              <a:t> </a:t>
-            </a:r>
-            <a:r>
-              <a:rPr lang="de-DE" sz="1200" kern="0" dirty="0" err="1">
-                <a:latin typeface="Courier New" panose="02070309020205020404" pitchFamily="49" charset="0"/>
-                <a:ea typeface="Arial Unicode MS" pitchFamily="34" charset="-128"/>
-                <a:cs typeface="Courier New" panose="02070309020205020404" pitchFamily="49" charset="0"/>
-              </a:rPr>
-              <a:t>since</a:t>
-            </a:r>
-            <a:r>
-              <a:rPr lang="de-DE" sz="1200" kern="0" dirty="0">
-                <a:latin typeface="Courier New" panose="02070309020205020404" pitchFamily="49" charset="0"/>
-                <a:ea typeface="Arial Unicode MS" pitchFamily="34" charset="-128"/>
-                <a:cs typeface="Courier New" panose="02070309020205020404" pitchFamily="49" charset="0"/>
-              </a:rPr>
-              <a:t> </a:t>
-            </a:r>
-            <a:r>
-              <a:rPr lang="de-DE" sz="1200" kern="0" dirty="0" err="1">
-                <a:latin typeface="Courier New" panose="02070309020205020404" pitchFamily="49" charset="0"/>
-                <a:ea typeface="Arial Unicode MS" pitchFamily="34" charset="-128"/>
-                <a:cs typeface="Courier New" panose="02070309020205020404" pitchFamily="49" charset="0"/>
-              </a:rPr>
-              <a:t>the</a:t>
-            </a:r>
-            <a:r>
-              <a:rPr lang="de-DE" sz="1200" kern="0" dirty="0">
-                <a:latin typeface="Courier New" panose="02070309020205020404" pitchFamily="49" charset="0"/>
-                <a:ea typeface="Arial Unicode MS" pitchFamily="34" charset="-128"/>
-                <a:cs typeface="Courier New" panose="02070309020205020404" pitchFamily="49" charset="0"/>
-              </a:rPr>
-              <a:t> time(2) </a:t>
-            </a:r>
-            <a:r>
-              <a:rPr lang="de-DE" sz="1200" kern="0" dirty="0" err="1">
-                <a:latin typeface="Courier New" panose="02070309020205020404" pitchFamily="49" charset="0"/>
-                <a:ea typeface="Arial Unicode MS" pitchFamily="34" charset="-128"/>
-                <a:cs typeface="Courier New" panose="02070309020205020404" pitchFamily="49" charset="0"/>
-              </a:rPr>
-              <a:t>epoch</a:t>
-            </a:r>
-            <a:r>
-              <a:rPr lang="de-DE" sz="1200" kern="0" dirty="0">
-                <a:latin typeface="Courier New" panose="02070309020205020404" pitchFamily="49" charset="0"/>
-                <a:ea typeface="Arial Unicode MS" pitchFamily="34" charset="-128"/>
-                <a:cs typeface="Courier New" panose="02070309020205020404" pitchFamily="49" charset="0"/>
-              </a:rPr>
-              <a:t>).</a:t>
-            </a:r>
-          </a:p>
-          <a:p>
-            <a:pPr fontAlgn="base">
-              <a:spcBef>
-                <a:spcPct val="50000"/>
-              </a:spcBef>
-              <a:spcAft>
-                <a:spcPct val="0"/>
-              </a:spcAft>
-              <a:buClr>
-                <a:srgbClr val="F0AB00"/>
-              </a:buClr>
-              <a:buSzPct val="80000"/>
-            </a:pPr>
-            <a:r>
-              <a:rPr lang="de-DE" sz="1200" kern="0" dirty="0">
-                <a:latin typeface="Courier New" panose="02070309020205020404" pitchFamily="49" charset="0"/>
-                <a:ea typeface="Arial Unicode MS" pitchFamily="34" charset="-128"/>
-                <a:cs typeface="Courier New" panose="02070309020205020404" pitchFamily="49" charset="0"/>
-              </a:rPr>
-              <a:t>  -- Andy Tannenbaum</a:t>
-            </a:r>
-          </a:p>
-        </p:txBody>
-      </p:sp>
       <p:pic>
         <p:nvPicPr>
           <p:cNvPr id="13" name="Grafik 12">
@@ -16264,12 +16011,12 @@
               <a:tabLst/>
             </a:pPr>
             <a:r>
-              <a:rPr lang="de-DE" sz="1100" kern="0" dirty="0" err="1">
+              <a:rPr lang="de-DE" sz="1100" kern="0" dirty="0">
                 <a:latin typeface="Courier New" panose="02070309020205020404" pitchFamily="49" charset="0"/>
                 <a:ea typeface="Arial Unicode MS" pitchFamily="34" charset="-128"/>
                 <a:cs typeface="Courier New" panose="02070309020205020404" pitchFamily="49" charset="0"/>
               </a:rPr>
-              <a:t>Postgres</a:t>
+              <a:t>PostgreSQL</a:t>
             </a:r>
             <a:endParaRPr kumimoji="0" lang="de-DE" sz="1100" b="0" i="0" u="none" strike="noStrike" kern="0" cap="none" spc="0" normalizeH="0" baseline="0" noProof="0" dirty="0">
               <a:ln>
@@ -16641,6 +16388,155 @@
           </a:fontRef>
         </p:style>
       </p:cxnSp>
+      <p:sp>
+        <p:nvSpPr>
+          <p:cNvPr id="178" name="Eckige Klammer links 177">
+            <a:extLst>
+              <a:ext uri="{FF2B5EF4-FFF2-40B4-BE49-F238E27FC236}">
+                <a16:creationId xmlns:a16="http://schemas.microsoft.com/office/drawing/2014/main" id="{12F8DA0C-2321-7EEA-73BE-21DADFD8B0DD}"/>
+              </a:ext>
+            </a:extLst>
+          </p:cNvPr>
+          <p:cNvSpPr/>
+          <p:nvPr/>
+        </p:nvSpPr>
+        <p:spPr>
+          <a:xfrm>
+            <a:off x="8583959" y="2294462"/>
+            <a:ext cx="195197" cy="3541690"/>
+          </a:xfrm>
+          <a:prstGeom prst="leftBracket">
+            <a:avLst/>
+          </a:prstGeom>
+          <a:ln w="25400">
+            <a:solidFill>
+              <a:schemeClr val="bg1"/>
+            </a:solidFill>
+            <a:headEnd type="none" w="med" len="med"/>
+            <a:tailEnd type="none" w="med" len="med"/>
+          </a:ln>
+        </p:spPr>
+        <p:style>
+          <a:lnRef idx="1">
+            <a:schemeClr val="accent1"/>
+          </a:lnRef>
+          <a:fillRef idx="0">
+            <a:schemeClr val="accent1"/>
+          </a:fillRef>
+          <a:effectRef idx="0">
+            <a:schemeClr val="accent1"/>
+          </a:effectRef>
+          <a:fontRef idx="minor">
+            <a:schemeClr val="tx1"/>
+          </a:fontRef>
+        </p:style>
+        <p:txBody>
+          <a:bodyPr rtlCol="0" anchor="ctr"/>
+          <a:lstStyle/>
+          <a:p>
+            <a:pPr algn="ctr"/>
+            <a:endParaRPr lang="de-DE"/>
+          </a:p>
+        </p:txBody>
+      </p:sp>
+      <p:pic>
+        <p:nvPicPr>
+          <p:cNvPr id="184" name="Grafik 183">
+            <a:extLst>
+              <a:ext uri="{FF2B5EF4-FFF2-40B4-BE49-F238E27FC236}">
+                <a16:creationId xmlns:a16="http://schemas.microsoft.com/office/drawing/2014/main" id="{888EE212-0A38-7574-B974-79CD42167647}"/>
+              </a:ext>
+            </a:extLst>
+          </p:cNvPr>
+          <p:cNvPicPr>
+            <a:picLocks noChangeAspect="1"/>
+          </p:cNvPicPr>
+          <p:nvPr/>
+        </p:nvPicPr>
+        <p:blipFill>
+          <a:blip r:embed="rId7"/>
+          <a:stretch>
+            <a:fillRect/>
+          </a:stretch>
+        </p:blipFill>
+        <p:spPr>
+          <a:xfrm>
+            <a:off x="7629496" y="5094107"/>
+            <a:ext cx="871157" cy="843933"/>
+          </a:xfrm>
+          <a:prstGeom prst="rect">
+            <a:avLst/>
+          </a:prstGeom>
+        </p:spPr>
+      </p:pic>
+      <p:sp>
+        <p:nvSpPr>
+          <p:cNvPr id="3" name="Trapezium 2">
+            <a:extLst>
+              <a:ext uri="{FF2B5EF4-FFF2-40B4-BE49-F238E27FC236}">
+                <a16:creationId xmlns:a16="http://schemas.microsoft.com/office/drawing/2014/main" id="{5564E94E-F5CC-AEF6-35DB-4435FEC0CC75}"/>
+              </a:ext>
+            </a:extLst>
+          </p:cNvPr>
+          <p:cNvSpPr/>
+          <p:nvPr/>
+        </p:nvSpPr>
+        <p:spPr bwMode="gray">
+          <a:xfrm>
+            <a:off x="1216908" y="2761510"/>
+            <a:ext cx="5067014" cy="280208"/>
+          </a:xfrm>
+          <a:prstGeom prst="trapezoid">
+            <a:avLst>
+              <a:gd name="adj" fmla="val 679987"/>
+            </a:avLst>
+          </a:prstGeom>
+          <a:solidFill>
+            <a:schemeClr val="bg2">
+              <a:lumMod val="40000"/>
+              <a:lumOff val="60000"/>
+            </a:schemeClr>
+          </a:solidFill>
+          <a:ln w="25400" algn="ctr">
+            <a:noFill/>
+            <a:miter lim="800000"/>
+            <a:headEnd/>
+            <a:tailEnd/>
+          </a:ln>
+        </p:spPr>
+        <p:txBody>
+          <a:bodyPr lIns="90000" tIns="72000" rIns="90000" bIns="72000" rtlCol="0" anchor="ctr"/>
+          <a:lstStyle/>
+          <a:p>
+            <a:pPr marR="0" algn="ctr" defTabSz="914400" eaLnBrk="1" fontAlgn="base" latinLnBrk="0" hangingPunct="1">
+              <a:lnSpc>
+                <a:spcPct val="100000"/>
+              </a:lnSpc>
+              <a:spcBef>
+                <a:spcPct val="50000"/>
+              </a:spcBef>
+              <a:spcAft>
+                <a:spcPct val="0"/>
+              </a:spcAft>
+              <a:buClr>
+                <a:srgbClr val="F0AB00"/>
+              </a:buClr>
+              <a:buSzPct val="80000"/>
+              <a:tabLst/>
+            </a:pPr>
+            <a:endParaRPr kumimoji="0" lang="en-DE" sz="1800" b="0" i="0" u="none" strike="noStrike" kern="0" cap="none" spc="0" normalizeH="0" baseline="0" noProof="0" dirty="0" err="1">
+              <a:ln>
+                <a:noFill/>
+              </a:ln>
+              <a:effectLst/>
+              <a:uLnTx/>
+              <a:uFillTx/>
+              <a:ea typeface="Arial Unicode MS" pitchFamily="34" charset="-128"/>
+              <a:cs typeface="Arial Unicode MS" pitchFamily="34" charset="-128"/>
+            </a:endParaRPr>
+          </a:p>
+        </p:txBody>
+      </p:sp>
       <p:pic>
         <p:nvPicPr>
           <p:cNvPr id="169" name="Grafik 168" descr="Internet Silhouette">
@@ -16679,85 +16575,280 @@
       </p:pic>
       <p:sp>
         <p:nvSpPr>
-          <p:cNvPr id="178" name="Eckige Klammer links 177">
+          <p:cNvPr id="2" name="Rounded Rectangle 1">
             <a:extLst>
               <a:ext uri="{FF2B5EF4-FFF2-40B4-BE49-F238E27FC236}">
-                <a16:creationId xmlns:a16="http://schemas.microsoft.com/office/drawing/2014/main" id="{12F8DA0C-2321-7EEA-73BE-21DADFD8B0DD}"/>
+                <a16:creationId xmlns:a16="http://schemas.microsoft.com/office/drawing/2014/main" id="{9AFA5674-5A3B-403C-D85E-468F9C5034A9}"/>
               </a:ext>
             </a:extLst>
           </p:cNvPr>
           <p:cNvSpPr/>
           <p:nvPr/>
         </p:nvSpPr>
-        <p:spPr>
-          <a:xfrm>
-            <a:off x="8583959" y="2294462"/>
-            <a:ext cx="195197" cy="3541690"/>
-          </a:xfrm>
-          <a:prstGeom prst="leftBracket">
-            <a:avLst/>
+        <p:spPr bwMode="gray">
+          <a:xfrm>
+            <a:off x="1049277" y="3041717"/>
+            <a:ext cx="5370439" cy="1696127"/>
+          </a:xfrm>
+          <a:prstGeom prst="roundRect">
+            <a:avLst>
+              <a:gd name="adj" fmla="val 9690"/>
+            </a:avLst>
           </a:prstGeom>
-          <a:ln w="25400">
-            <a:solidFill>
-              <a:schemeClr val="bg1"/>
-            </a:solidFill>
-            <a:headEnd type="none" w="med" len="med"/>
-            <a:tailEnd type="none" w="med" len="med"/>
-          </a:ln>
+          <a:effectLst/>
         </p:spPr>
         <p:style>
-          <a:lnRef idx="1">
-            <a:schemeClr val="accent1"/>
+          <a:lnRef idx="2">
+            <a:schemeClr val="accent2">
+              <a:shade val="15000"/>
+            </a:schemeClr>
           </a:lnRef>
-          <a:fillRef idx="0">
-            <a:schemeClr val="accent1"/>
+          <a:fillRef idx="1">
+            <a:schemeClr val="accent2"/>
           </a:fillRef>
           <a:effectRef idx="0">
-            <a:schemeClr val="accent1"/>
+            <a:schemeClr val="accent2"/>
           </a:effectRef>
           <a:fontRef idx="minor">
-            <a:schemeClr val="tx1"/>
+            <a:schemeClr val="lt1"/>
           </a:fontRef>
         </p:style>
         <p:txBody>
-          <a:bodyPr rtlCol="0" anchor="ctr"/>
+          <a:bodyPr wrap="square" lIns="108000" tIns="108000" rIns="108000" bIns="108000" rtlCol="0">
+            <a:spAutoFit/>
+          </a:bodyPr>
           <a:lstStyle/>
           <a:p>
-            <a:pPr algn="ctr"/>
-            <a:endParaRPr lang="de-DE"/>
+            <a:pPr fontAlgn="base">
+              <a:spcBef>
+                <a:spcPct val="50000"/>
+              </a:spcBef>
+              <a:spcAft>
+                <a:spcPct val="0"/>
+              </a:spcAft>
+              <a:buClr>
+                <a:srgbClr val="F0AB00"/>
+              </a:buClr>
+              <a:buSzPct val="80000"/>
+            </a:pPr>
+            <a:r>
+              <a:rPr lang="de-DE" sz="1200" b="1" kern="0" dirty="0">
+                <a:latin typeface="Courier New" panose="02070309020205020404" pitchFamily="49" charset="0"/>
+                <a:ea typeface="Arial Unicode MS" pitchFamily="34" charset="-128"/>
+                <a:cs typeface="Courier New" panose="02070309020205020404" pitchFamily="49" charset="0"/>
+              </a:rPr>
+              <a:t>$&gt;: </a:t>
+            </a:r>
+            <a:r>
+              <a:rPr lang="de-DE" sz="1200" b="1" kern="0" dirty="0" err="1">
+                <a:latin typeface="Courier New" panose="02070309020205020404" pitchFamily="49" charset="0"/>
+                <a:ea typeface="Arial Unicode MS" pitchFamily="34" charset="-128"/>
+                <a:cs typeface="Courier New" panose="02070309020205020404" pitchFamily="49" charset="0"/>
+              </a:rPr>
+              <a:t>curl</a:t>
+            </a:r>
+            <a:r>
+              <a:rPr lang="de-DE" sz="1200" b="1" kern="0" dirty="0">
+                <a:latin typeface="Courier New" panose="02070309020205020404" pitchFamily="49" charset="0"/>
+                <a:ea typeface="Arial Unicode MS" pitchFamily="34" charset="-128"/>
+                <a:cs typeface="Courier New" panose="02070309020205020404" pitchFamily="49" charset="0"/>
+              </a:rPr>
+              <a:t> </a:t>
+            </a:r>
+            <a:r>
+              <a:rPr lang="de-DE" sz="1200" b="1" kern="0" dirty="0" err="1">
+                <a:latin typeface="Courier New" panose="02070309020205020404" pitchFamily="49" charset="0"/>
+                <a:ea typeface="Arial Unicode MS" pitchFamily="34" charset="-128"/>
+                <a:cs typeface="Courier New" panose="02070309020205020404" pitchFamily="49" charset="0"/>
+              </a:rPr>
+              <a:t>fortune-cookies.ingress.mycluster</a:t>
+            </a:r>
+            <a:r>
+              <a:rPr lang="de-DE" sz="1200" b="1" kern="0" dirty="0">
+                <a:latin typeface="Courier New" panose="02070309020205020404" pitchFamily="49" charset="0"/>
+                <a:ea typeface="Arial Unicode MS" pitchFamily="34" charset="-128"/>
+                <a:cs typeface="Courier New" panose="02070309020205020404" pitchFamily="49" charset="0"/>
+              </a:rPr>
+              <a:t>…</a:t>
+            </a:r>
+          </a:p>
+          <a:p>
+            <a:pPr fontAlgn="base">
+              <a:spcBef>
+                <a:spcPct val="50000"/>
+              </a:spcBef>
+              <a:spcAft>
+                <a:spcPct val="0"/>
+              </a:spcAft>
+              <a:buClr>
+                <a:srgbClr val="F0AB00"/>
+              </a:buClr>
+              <a:buSzPct val="80000"/>
+            </a:pPr>
+            <a:endParaRPr lang="de-DE" sz="1200" kern="0" dirty="0">
+              <a:latin typeface="Courier New" panose="02070309020205020404" pitchFamily="49" charset="0"/>
+              <a:ea typeface="Arial Unicode MS" pitchFamily="34" charset="-128"/>
+              <a:cs typeface="Courier New" panose="02070309020205020404" pitchFamily="49" charset="0"/>
+            </a:endParaRPr>
+          </a:p>
+          <a:p>
+            <a:pPr fontAlgn="base">
+              <a:spcBef>
+                <a:spcPct val="50000"/>
+              </a:spcBef>
+              <a:spcAft>
+                <a:spcPct val="0"/>
+              </a:spcAft>
+              <a:buClr>
+                <a:srgbClr val="F0AB00"/>
+              </a:buClr>
+              <a:buSzPct val="80000"/>
+            </a:pPr>
+            <a:r>
+              <a:rPr lang="de-DE" sz="1200" kern="0" dirty="0">
+                <a:latin typeface="Courier New" panose="02070309020205020404" pitchFamily="49" charset="0"/>
+                <a:ea typeface="Arial Unicode MS" pitchFamily="34" charset="-128"/>
+                <a:cs typeface="Courier New" panose="02070309020205020404" pitchFamily="49" charset="0"/>
+              </a:rPr>
+              <a:t>UNIX was half a </a:t>
+            </a:r>
+            <a:r>
+              <a:rPr lang="de-DE" sz="1200" kern="0" dirty="0" err="1">
+                <a:latin typeface="Courier New" panose="02070309020205020404" pitchFamily="49" charset="0"/>
+                <a:ea typeface="Arial Unicode MS" pitchFamily="34" charset="-128"/>
+                <a:cs typeface="Courier New" panose="02070309020205020404" pitchFamily="49" charset="0"/>
+              </a:rPr>
+              <a:t>billion</a:t>
+            </a:r>
+            <a:r>
+              <a:rPr lang="de-DE" sz="1200" kern="0" dirty="0">
+                <a:latin typeface="Courier New" panose="02070309020205020404" pitchFamily="49" charset="0"/>
+                <a:ea typeface="Arial Unicode MS" pitchFamily="34" charset="-128"/>
+                <a:cs typeface="Courier New" panose="02070309020205020404" pitchFamily="49" charset="0"/>
+              </a:rPr>
+              <a:t> (500000000) </a:t>
+            </a:r>
+            <a:r>
+              <a:rPr lang="de-DE" sz="1200" kern="0" dirty="0" err="1">
+                <a:latin typeface="Courier New" panose="02070309020205020404" pitchFamily="49" charset="0"/>
+                <a:ea typeface="Arial Unicode MS" pitchFamily="34" charset="-128"/>
+                <a:cs typeface="Courier New" panose="02070309020205020404" pitchFamily="49" charset="0"/>
+              </a:rPr>
+              <a:t>seconds</a:t>
+            </a:r>
+            <a:r>
+              <a:rPr lang="de-DE" sz="1200" kern="0" dirty="0">
+                <a:latin typeface="Courier New" panose="02070309020205020404" pitchFamily="49" charset="0"/>
+                <a:ea typeface="Arial Unicode MS" pitchFamily="34" charset="-128"/>
+                <a:cs typeface="Courier New" panose="02070309020205020404" pitchFamily="49" charset="0"/>
+              </a:rPr>
+              <a:t> </a:t>
+            </a:r>
+            <a:r>
+              <a:rPr lang="de-DE" sz="1200" kern="0" dirty="0" err="1">
+                <a:latin typeface="Courier New" panose="02070309020205020404" pitchFamily="49" charset="0"/>
+                <a:ea typeface="Arial Unicode MS" pitchFamily="34" charset="-128"/>
+                <a:cs typeface="Courier New" panose="02070309020205020404" pitchFamily="49" charset="0"/>
+              </a:rPr>
+              <a:t>old</a:t>
+            </a:r>
+            <a:r>
+              <a:rPr lang="de-DE" sz="1200" kern="0" dirty="0">
+                <a:latin typeface="Courier New" panose="02070309020205020404" pitchFamily="49" charset="0"/>
+                <a:ea typeface="Arial Unicode MS" pitchFamily="34" charset="-128"/>
+                <a:cs typeface="Courier New" panose="02070309020205020404" pitchFamily="49" charset="0"/>
+              </a:rPr>
+              <a:t> on Tue Nov 5 00:53:20 1985 GMT (</a:t>
+            </a:r>
+            <a:r>
+              <a:rPr lang="de-DE" sz="1200" kern="0" dirty="0" err="1">
+                <a:latin typeface="Courier New" panose="02070309020205020404" pitchFamily="49" charset="0"/>
+                <a:ea typeface="Arial Unicode MS" pitchFamily="34" charset="-128"/>
+                <a:cs typeface="Courier New" panose="02070309020205020404" pitchFamily="49" charset="0"/>
+              </a:rPr>
+              <a:t>measuring</a:t>
+            </a:r>
+            <a:r>
+              <a:rPr lang="de-DE" sz="1200" kern="0" dirty="0">
+                <a:latin typeface="Courier New" panose="02070309020205020404" pitchFamily="49" charset="0"/>
+                <a:ea typeface="Arial Unicode MS" pitchFamily="34" charset="-128"/>
+                <a:cs typeface="Courier New" panose="02070309020205020404" pitchFamily="49" charset="0"/>
+              </a:rPr>
+              <a:t> </a:t>
+            </a:r>
+            <a:r>
+              <a:rPr lang="de-DE" sz="1200" kern="0" dirty="0" err="1">
+                <a:latin typeface="Courier New" panose="02070309020205020404" pitchFamily="49" charset="0"/>
+                <a:ea typeface="Arial Unicode MS" pitchFamily="34" charset="-128"/>
+                <a:cs typeface="Courier New" panose="02070309020205020404" pitchFamily="49" charset="0"/>
+              </a:rPr>
+              <a:t>since</a:t>
+            </a:r>
+            <a:r>
+              <a:rPr lang="de-DE" sz="1200" kern="0" dirty="0">
+                <a:latin typeface="Courier New" panose="02070309020205020404" pitchFamily="49" charset="0"/>
+                <a:ea typeface="Arial Unicode MS" pitchFamily="34" charset="-128"/>
+                <a:cs typeface="Courier New" panose="02070309020205020404" pitchFamily="49" charset="0"/>
+              </a:rPr>
+              <a:t> </a:t>
+            </a:r>
+            <a:r>
+              <a:rPr lang="de-DE" sz="1200" kern="0" dirty="0" err="1">
+                <a:latin typeface="Courier New" panose="02070309020205020404" pitchFamily="49" charset="0"/>
+                <a:ea typeface="Arial Unicode MS" pitchFamily="34" charset="-128"/>
+                <a:cs typeface="Courier New" panose="02070309020205020404" pitchFamily="49" charset="0"/>
+              </a:rPr>
+              <a:t>the</a:t>
+            </a:r>
+            <a:r>
+              <a:rPr lang="de-DE" sz="1200" kern="0" dirty="0">
+                <a:latin typeface="Courier New" panose="02070309020205020404" pitchFamily="49" charset="0"/>
+                <a:ea typeface="Arial Unicode MS" pitchFamily="34" charset="-128"/>
+                <a:cs typeface="Courier New" panose="02070309020205020404" pitchFamily="49" charset="0"/>
+              </a:rPr>
+              <a:t> time(2) </a:t>
+            </a:r>
+            <a:r>
+              <a:rPr lang="de-DE" sz="1200" kern="0" dirty="0" err="1">
+                <a:latin typeface="Courier New" panose="02070309020205020404" pitchFamily="49" charset="0"/>
+                <a:ea typeface="Arial Unicode MS" pitchFamily="34" charset="-128"/>
+                <a:cs typeface="Courier New" panose="02070309020205020404" pitchFamily="49" charset="0"/>
+              </a:rPr>
+              <a:t>epoch</a:t>
+            </a:r>
+            <a:r>
+              <a:rPr lang="de-DE" sz="1200" kern="0" dirty="0">
+                <a:latin typeface="Courier New" panose="02070309020205020404" pitchFamily="49" charset="0"/>
+                <a:ea typeface="Arial Unicode MS" pitchFamily="34" charset="-128"/>
+                <a:cs typeface="Courier New" panose="02070309020205020404" pitchFamily="49" charset="0"/>
+              </a:rPr>
+              <a:t>).</a:t>
+            </a:r>
+          </a:p>
+          <a:p>
+            <a:pPr fontAlgn="base">
+              <a:spcBef>
+                <a:spcPct val="50000"/>
+              </a:spcBef>
+              <a:spcAft>
+                <a:spcPct val="0"/>
+              </a:spcAft>
+              <a:buClr>
+                <a:srgbClr val="F0AB00"/>
+              </a:buClr>
+              <a:buSzPct val="80000"/>
+            </a:pPr>
+            <a:r>
+              <a:rPr lang="de-DE" sz="1200" kern="0" dirty="0">
+                <a:latin typeface="Courier New" panose="02070309020205020404" pitchFamily="49" charset="0"/>
+                <a:ea typeface="Arial Unicode MS" pitchFamily="34" charset="-128"/>
+                <a:cs typeface="Courier New" panose="02070309020205020404" pitchFamily="49" charset="0"/>
+              </a:rPr>
+              <a:t>  -- Andy Tannenbaum</a:t>
+            </a:r>
           </a:p>
         </p:txBody>
       </p:sp>
-      <p:pic>
-        <p:nvPicPr>
-          <p:cNvPr id="184" name="Grafik 183">
-            <a:extLst>
-              <a:ext uri="{FF2B5EF4-FFF2-40B4-BE49-F238E27FC236}">
-                <a16:creationId xmlns:a16="http://schemas.microsoft.com/office/drawing/2014/main" id="{888EE212-0A38-7574-B974-79CD42167647}"/>
-              </a:ext>
-            </a:extLst>
-          </p:cNvPr>
-          <p:cNvPicPr>
-            <a:picLocks noChangeAspect="1"/>
-          </p:cNvPicPr>
-          <p:nvPr/>
-        </p:nvPicPr>
-        <p:blipFill>
-          <a:blip r:embed="rId7"/>
-          <a:stretch>
-            <a:fillRect/>
-          </a:stretch>
-        </p:blipFill>
-        <p:spPr>
-          <a:xfrm>
-            <a:off x="7629496" y="5094107"/>
-            <a:ext cx="871157" cy="843933"/>
-          </a:xfrm>
-          <a:prstGeom prst="rect">
-            <a:avLst/>
-          </a:prstGeom>
-        </p:spPr>
-      </p:pic>
     </p:spTree>
     <p:extLst>
       <p:ext uri="{BB962C8B-B14F-4D97-AF65-F5344CB8AC3E}">
@@ -16780,9 +16871,6 @@
                     <p:cTn id="3" fill="hold">
                       <p:stCondLst>
                         <p:cond delay="indefinite"/>
-                        <p:cond evt="onBegin" delay="0">
-                          <p:tn val="2"/>
-                        </p:cond>
                       </p:stCondLst>
                       <p:childTnLst>
                         <p:par>
@@ -16792,7 +16880,7 @@
                             </p:stCondLst>
                             <p:childTnLst>
                               <p:par>
-                                <p:cTn id="5" presetID="2" presetClass="entr" presetSubtype="4" fill="hold" nodeType="withEffect">
+                                <p:cTn id="5" presetID="1" presetClass="entr" presetSubtype="0" fill="hold" nodeType="clickEffect">
                                   <p:stCondLst>
                                     <p:cond delay="0"/>
                                   </p:stCondLst>
@@ -16805,98 +16893,7 @@
                                           </p:stCondLst>
                                         </p:cTn>
                                         <p:tgtEl>
-                                          <p:spTgt spid="27"/>
-                                        </p:tgtEl>
-                                        <p:attrNameLst>
-                                          <p:attrName>style.visibility</p:attrName>
-                                        </p:attrNameLst>
-                                      </p:cBhvr>
-                                      <p:to>
-                                        <p:strVal val="visible"/>
-                                      </p:to>
-                                    </p:set>
-                                    <p:anim calcmode="lin" valueType="num">
-                                      <p:cBhvr additive="base">
-                                        <p:cTn id="7" dur="500" fill="hold"/>
-                                        <p:tgtEl>
-                                          <p:spTgt spid="27"/>
-                                        </p:tgtEl>
-                                        <p:attrNameLst>
-                                          <p:attrName>ppt_x</p:attrName>
-                                        </p:attrNameLst>
-                                      </p:cBhvr>
-                                      <p:tavLst>
-                                        <p:tav tm="0">
-                                          <p:val>
-                                            <p:strVal val="#ppt_x"/>
-                                          </p:val>
-                                        </p:tav>
-                                        <p:tav tm="100000">
-                                          <p:val>
-                                            <p:strVal val="#ppt_x"/>
-                                          </p:val>
-                                        </p:tav>
-                                      </p:tavLst>
-                                    </p:anim>
-                                    <p:anim calcmode="lin" valueType="num">
-                                      <p:cBhvr additive="base">
-                                        <p:cTn id="8" dur="500" fill="hold"/>
-                                        <p:tgtEl>
-                                          <p:spTgt spid="27"/>
-                                        </p:tgtEl>
-                                        <p:attrNameLst>
-                                          <p:attrName>ppt_y</p:attrName>
-                                        </p:attrNameLst>
-                                      </p:cBhvr>
-                                      <p:tavLst>
-                                        <p:tav tm="0">
-                                          <p:val>
-                                            <p:strVal val="1+#ppt_h/2"/>
-                                          </p:val>
-                                        </p:tav>
-                                        <p:tav tm="100000">
-                                          <p:val>
-                                            <p:strVal val="#ppt_y"/>
-                                          </p:val>
-                                        </p:tav>
-                                      </p:tavLst>
-                                    </p:anim>
-                                  </p:childTnLst>
-                                </p:cTn>
-                              </p:par>
-                            </p:childTnLst>
-                          </p:cTn>
-                        </p:par>
-                      </p:childTnLst>
-                    </p:cTn>
-                  </p:par>
-                  <p:par>
-                    <p:cTn id="9" fill="hold">
-                      <p:stCondLst>
-                        <p:cond delay="indefinite"/>
-                      </p:stCondLst>
-                      <p:childTnLst>
-                        <p:par>
-                          <p:cTn id="10" fill="hold">
-                            <p:stCondLst>
-                              <p:cond delay="0"/>
-                            </p:stCondLst>
-                            <p:childTnLst>
-                              <p:par>
-                                <p:cTn id="11" presetID="1" presetClass="entr" presetSubtype="0" fill="hold" nodeType="clickEffect">
-                                  <p:stCondLst>
-                                    <p:cond delay="0"/>
-                                  </p:stCondLst>
-                                  <p:childTnLst>
-                                    <p:set>
-                                      <p:cBhvr>
-                                        <p:cTn id="12" dur="1" fill="hold">
-                                          <p:stCondLst>
-                                            <p:cond delay="0"/>
-                                          </p:stCondLst>
-                                        </p:cTn>
-                                        <p:tgtEl>
-                                          <p:spTgt spid="154"/>
+                                          <p:spTgt spid="71"/>
                                         </p:tgtEl>
                                         <p:attrNameLst>
                                           <p:attrName>style.visibility</p:attrName>
@@ -16910,20 +16907,20 @@
                                 </p:cTn>
                               </p:par>
                               <p:par>
-                                <p:cTn id="13" presetID="1" presetClass="entr" presetSubtype="0" fill="hold" nodeType="withEffect">
+                                <p:cTn id="7" presetID="1" presetClass="entr" presetSubtype="0" fill="hold" grpId="0" nodeType="withEffect">
                                   <p:stCondLst>
                                     <p:cond delay="0"/>
                                   </p:stCondLst>
                                   <p:childTnLst>
                                     <p:set>
                                       <p:cBhvr>
-                                        <p:cTn id="14" dur="1" fill="hold">
+                                        <p:cTn id="8" dur="1" fill="hold">
                                           <p:stCondLst>
                                             <p:cond delay="0"/>
                                           </p:stCondLst>
                                         </p:cTn>
                                         <p:tgtEl>
-                                          <p:spTgt spid="48"/>
+                                          <p:spTgt spid="85"/>
                                         </p:tgtEl>
                                         <p:attrNameLst>
                                           <p:attrName>style.visibility</p:attrName>
@@ -16937,20 +16934,47 @@
                                 </p:cTn>
                               </p:par>
                               <p:par>
-                                <p:cTn id="15" presetID="1" presetClass="entr" presetSubtype="0" fill="hold" nodeType="withEffect">
+                                <p:cTn id="9" presetID="1" presetClass="entr" presetSubtype="0" fill="hold" nodeType="withEffect">
                                   <p:stCondLst>
                                     <p:cond delay="0"/>
                                   </p:stCondLst>
                                   <p:childTnLst>
                                     <p:set>
                                       <p:cBhvr>
-                                        <p:cTn id="16" dur="1" fill="hold">
+                                        <p:cTn id="10" dur="1" fill="hold">
                                           <p:stCondLst>
                                             <p:cond delay="0"/>
                                           </p:stCondLst>
                                         </p:cTn>
                                         <p:tgtEl>
-                                          <p:spTgt spid="27"/>
+                                          <p:spTgt spid="93"/>
+                                        </p:tgtEl>
+                                        <p:attrNameLst>
+                                          <p:attrName>style.visibility</p:attrName>
+                                        </p:attrNameLst>
+                                      </p:cBhvr>
+                                      <p:to>
+                                        <p:strVal val="visible"/>
+                                      </p:to>
+                                    </p:set>
+                                  </p:childTnLst>
+                                </p:cTn>
+                              </p:par>
+                              <p:par>
+                                <p:cTn id="11" presetID="1" presetClass="entr" presetSubtype="0" fill="hold" nodeType="withEffect">
+                                  <p:stCondLst>
+                                    <p:cond delay="0"/>
+                                  </p:stCondLst>
+                                  <p:childTnLst>
+                                    <p:set>
+                                      <p:cBhvr>
+                                        <p:cTn id="12" dur="1" fill="hold">
+                                          <p:stCondLst>
+                                            <p:cond delay="0"/>
+                                          </p:stCondLst>
+                                        </p:cTn>
+                                        <p:tgtEl>
+                                          <p:spTgt spid="67"/>
                                         </p:tgtEl>
                                         <p:attrNameLst>
                                           <p:attrName>style.visibility</p:attrName>
@@ -16970,32 +16994,32 @@
                     </p:cTn>
                   </p:par>
                   <p:par>
-                    <p:cTn id="17" fill="hold">
+                    <p:cTn id="13" fill="hold">
                       <p:stCondLst>
                         <p:cond delay="indefinite"/>
                       </p:stCondLst>
                       <p:childTnLst>
                         <p:par>
-                          <p:cTn id="18" fill="hold">
+                          <p:cTn id="14" fill="hold">
                             <p:stCondLst>
                               <p:cond delay="0"/>
                             </p:stCondLst>
                             <p:childTnLst>
                               <p:par>
-                                <p:cTn id="19" presetID="1" presetClass="entr" presetSubtype="0" fill="hold" nodeType="clickEffect">
+                                <p:cTn id="15" presetID="1" presetClass="entr" presetSubtype="0" fill="hold" nodeType="clickEffect">
                                   <p:stCondLst>
                                     <p:cond delay="0"/>
                                   </p:stCondLst>
                                   <p:childTnLst>
                                     <p:set>
                                       <p:cBhvr>
-                                        <p:cTn id="20" dur="1" fill="hold">
+                                        <p:cTn id="16" dur="1" fill="hold">
                                           <p:stCondLst>
                                             <p:cond delay="0"/>
                                           </p:stCondLst>
                                         </p:cTn>
                                         <p:tgtEl>
-                                          <p:spTgt spid="71"/>
+                                          <p:spTgt spid="28"/>
                                         </p:tgtEl>
                                         <p:attrNameLst>
                                           <p:attrName>style.visibility</p:attrName>
@@ -17009,7 +17033,61 @@
                                 </p:cTn>
                               </p:par>
                               <p:par>
-                                <p:cTn id="21" presetID="1" presetClass="entr" presetSubtype="0" fill="hold" grpId="0" nodeType="withEffect">
+                                <p:cTn id="17" presetID="1" presetClass="entr" presetSubtype="0" fill="hold" nodeType="withEffect">
+                                  <p:stCondLst>
+                                    <p:cond delay="0"/>
+                                  </p:stCondLst>
+                                  <p:childTnLst>
+                                    <p:set>
+                                      <p:cBhvr>
+                                        <p:cTn id="18" dur="1" fill="hold">
+                                          <p:stCondLst>
+                                            <p:cond delay="0"/>
+                                          </p:stCondLst>
+                                        </p:cTn>
+                                        <p:tgtEl>
+                                          <p:spTgt spid="134"/>
+                                        </p:tgtEl>
+                                        <p:attrNameLst>
+                                          <p:attrName>style.visibility</p:attrName>
+                                        </p:attrNameLst>
+                                      </p:cBhvr>
+                                      <p:to>
+                                        <p:strVal val="visible"/>
+                                      </p:to>
+                                    </p:set>
+                                  </p:childTnLst>
+                                </p:cTn>
+                              </p:par>
+                              <p:par>
+                                <p:cTn id="19" presetID="1" presetClass="entr" presetSubtype="0" fill="hold" grpId="0" nodeType="withEffect">
+                                  <p:stCondLst>
+                                    <p:cond delay="0"/>
+                                  </p:stCondLst>
+                                  <p:childTnLst>
+                                    <p:set>
+                                      <p:cBhvr>
+                                        <p:cTn id="20" dur="1" fill="hold">
+                                          <p:stCondLst>
+                                            <p:cond delay="0"/>
+                                          </p:stCondLst>
+                                        </p:cTn>
+                                        <p:tgtEl>
+                                          <p:spTgt spid="81"/>
+                                        </p:tgtEl>
+                                        <p:attrNameLst>
+                                          <p:attrName>style.visibility</p:attrName>
+                                        </p:attrNameLst>
+                                      </p:cBhvr>
+                                      <p:to>
+                                        <p:strVal val="visible"/>
+                                      </p:to>
+                                    </p:set>
+                                  </p:childTnLst>
+                                </p:cTn>
+                              </p:par>
+                              <p:par>
+                                <p:cTn id="21" presetID="1" presetClass="entr" presetSubtype="0" fill="hold" nodeType="withEffect">
                                   <p:stCondLst>
                                     <p:cond delay="0"/>
                                   </p:stCondLst>
@@ -17022,7 +17100,7 @@
                                           </p:stCondLst>
                                         </p:cTn>
                                         <p:tgtEl>
-                                          <p:spTgt spid="85"/>
+                                          <p:spTgt spid="157"/>
                                         </p:tgtEl>
                                         <p:attrNameLst>
                                           <p:attrName>style.visibility</p:attrName>
@@ -17049,7 +17127,7 @@
                                           </p:stCondLst>
                                         </p:cTn>
                                         <p:tgtEl>
-                                          <p:spTgt spid="93"/>
+                                          <p:spTgt spid="73"/>
                                         </p:tgtEl>
                                         <p:attrNameLst>
                                           <p:attrName>style.visibility</p:attrName>
@@ -17076,7 +17154,7 @@
                                           </p:stCondLst>
                                         </p:cTn>
                                         <p:tgtEl>
-                                          <p:spTgt spid="67"/>
+                                          <p:spTgt spid="52"/>
                                         </p:tgtEl>
                                         <p:attrNameLst>
                                           <p:attrName>style.visibility</p:attrName>
@@ -17103,7 +17181,7 @@
                                           </p:stCondLst>
                                         </p:cTn>
                                         <p:tgtEl>
-                                          <p:spTgt spid="152"/>
+                                          <p:spTgt spid="136"/>
                                         </p:tgtEl>
                                         <p:attrNameLst>
                                           <p:attrName>style.visibility</p:attrName>
@@ -17148,7 +17226,7 @@
                                           </p:stCondLst>
                                         </p:cTn>
                                         <p:tgtEl>
-                                          <p:spTgt spid="28"/>
+                                          <p:spTgt spid="154"/>
                                         </p:tgtEl>
                                         <p:attrNameLst>
                                           <p:attrName>style.visibility</p:attrName>
@@ -17175,7 +17253,7 @@
                                           </p:stCondLst>
                                         </p:cTn>
                                         <p:tgtEl>
-                                          <p:spTgt spid="134"/>
+                                          <p:spTgt spid="48"/>
                                         </p:tgtEl>
                                         <p:attrNameLst>
                                           <p:attrName>style.visibility</p:attrName>
@@ -17189,7 +17267,7 @@
                                 </p:cTn>
                               </p:par>
                               <p:par>
-                                <p:cTn id="35" presetID="1" presetClass="entr" presetSubtype="0" fill="hold" grpId="0" nodeType="withEffect">
+                                <p:cTn id="35" presetID="1" presetClass="entr" presetSubtype="0" fill="hold" nodeType="withEffect">
                                   <p:stCondLst>
                                     <p:cond delay="0"/>
                                   </p:stCondLst>
@@ -17202,7 +17280,7 @@
                                           </p:stCondLst>
                                         </p:cTn>
                                         <p:tgtEl>
-                                          <p:spTgt spid="81"/>
+                                          <p:spTgt spid="27"/>
                                         </p:tgtEl>
                                         <p:attrNameLst>
                                           <p:attrName>style.visibility</p:attrName>
@@ -17229,7 +17307,7 @@
                                           </p:stCondLst>
                                         </p:cTn>
                                         <p:tgtEl>
-                                          <p:spTgt spid="157"/>
+                                          <p:spTgt spid="152"/>
                                         </p:tgtEl>
                                         <p:attrNameLst>
                                           <p:attrName>style.visibility</p:attrName>
@@ -17243,7 +17321,7 @@
                                 </p:cTn>
                               </p:par>
                               <p:par>
-                                <p:cTn id="39" presetID="1" presetClass="entr" presetSubtype="0" fill="hold" nodeType="withEffect">
+                                <p:cTn id="39" presetID="2" presetClass="entr" presetSubtype="1" fill="hold" nodeType="withEffect">
                                   <p:stCondLst>
                                     <p:cond delay="0"/>
                                   </p:stCondLst>
@@ -17256,7 +17334,98 @@
                                           </p:stCondLst>
                                         </p:cTn>
                                         <p:tgtEl>
-                                          <p:spTgt spid="73"/>
+                                          <p:spTgt spid="27"/>
+                                        </p:tgtEl>
+                                        <p:attrNameLst>
+                                          <p:attrName>style.visibility</p:attrName>
+                                        </p:attrNameLst>
+                                      </p:cBhvr>
+                                      <p:to>
+                                        <p:strVal val="visible"/>
+                                      </p:to>
+                                    </p:set>
+                                    <p:anim calcmode="lin" valueType="num">
+                                      <p:cBhvr additive="base">
+                                        <p:cTn id="41" dur="200" fill="hold"/>
+                                        <p:tgtEl>
+                                          <p:spTgt spid="27"/>
+                                        </p:tgtEl>
+                                        <p:attrNameLst>
+                                          <p:attrName>ppt_x</p:attrName>
+                                        </p:attrNameLst>
+                                      </p:cBhvr>
+                                      <p:tavLst>
+                                        <p:tav tm="0">
+                                          <p:val>
+                                            <p:strVal val="#ppt_x"/>
+                                          </p:val>
+                                        </p:tav>
+                                        <p:tav tm="100000">
+                                          <p:val>
+                                            <p:strVal val="#ppt_x"/>
+                                          </p:val>
+                                        </p:tav>
+                                      </p:tavLst>
+                                    </p:anim>
+                                    <p:anim calcmode="lin" valueType="num">
+                                      <p:cBhvr additive="base">
+                                        <p:cTn id="42" dur="200" fill="hold"/>
+                                        <p:tgtEl>
+                                          <p:spTgt spid="27"/>
+                                        </p:tgtEl>
+                                        <p:attrNameLst>
+                                          <p:attrName>ppt_y</p:attrName>
+                                        </p:attrNameLst>
+                                      </p:cBhvr>
+                                      <p:tavLst>
+                                        <p:tav tm="0">
+                                          <p:val>
+                                            <p:strVal val="0-#ppt_h/2"/>
+                                          </p:val>
+                                        </p:tav>
+                                        <p:tav tm="100000">
+                                          <p:val>
+                                            <p:strVal val="#ppt_y"/>
+                                          </p:val>
+                                        </p:tav>
+                                      </p:tavLst>
+                                    </p:anim>
+                                  </p:childTnLst>
+                                </p:cTn>
+                              </p:par>
+                            </p:childTnLst>
+                          </p:cTn>
+                        </p:par>
+                      </p:childTnLst>
+                    </p:cTn>
+                  </p:par>
+                  <p:par>
+                    <p:cTn id="43" fill="hold">
+                      <p:stCondLst>
+                        <p:cond delay="indefinite"/>
+                      </p:stCondLst>
+                      <p:childTnLst>
+                        <p:par>
+                          <p:cTn id="44" fill="hold">
+                            <p:stCondLst>
+                              <p:cond delay="0"/>
+                            </p:stCondLst>
+                            <p:childTnLst>
+                              <p:par>
+                                <p:cTn id="45" presetID="1" presetClass="entr" presetSubtype="0" fill="hold" nodeType="clickEffect">
+                                  <p:stCondLst>
+                                    <p:cond delay="0"/>
+                                  </p:stCondLst>
+                                  <p:childTnLst>
+                                    <p:set>
+                                      <p:cBhvr>
+                                        <p:cTn id="46" dur="1" fill="hold">
+                                          <p:stCondLst>
+                                            <p:cond delay="0"/>
+                                          </p:stCondLst>
+                                        </p:cTn>
+                                        <p:tgtEl>
+                                          <p:spTgt spid="45"/>
                                         </p:tgtEl>
                                         <p:attrNameLst>
                                           <p:attrName>style.visibility</p:attrName>
@@ -17270,79 +17439,7 @@
                                 </p:cTn>
                               </p:par>
                               <p:par>
-                                <p:cTn id="41" presetID="1" presetClass="entr" presetSubtype="0" fill="hold" nodeType="withEffect">
-                                  <p:stCondLst>
-                                    <p:cond delay="0"/>
-                                  </p:stCondLst>
-                                  <p:childTnLst>
-                                    <p:set>
-                                      <p:cBhvr>
-                                        <p:cTn id="42" dur="1" fill="hold">
-                                          <p:stCondLst>
-                                            <p:cond delay="0"/>
-                                          </p:stCondLst>
-                                        </p:cTn>
-                                        <p:tgtEl>
-                                          <p:spTgt spid="52"/>
-                                        </p:tgtEl>
-                                        <p:attrNameLst>
-                                          <p:attrName>style.visibility</p:attrName>
-                                        </p:attrNameLst>
-                                      </p:cBhvr>
-                                      <p:to>
-                                        <p:strVal val="visible"/>
-                                      </p:to>
-                                    </p:set>
-                                  </p:childTnLst>
-                                </p:cTn>
-                              </p:par>
-                              <p:par>
-                                <p:cTn id="43" presetID="1" presetClass="entr" presetSubtype="0" fill="hold" nodeType="withEffect">
-                                  <p:stCondLst>
-                                    <p:cond delay="0"/>
-                                  </p:stCondLst>
-                                  <p:childTnLst>
-                                    <p:set>
-                                      <p:cBhvr>
-                                        <p:cTn id="44" dur="1" fill="hold">
-                                          <p:stCondLst>
-                                            <p:cond delay="0"/>
-                                          </p:stCondLst>
-                                        </p:cTn>
-                                        <p:tgtEl>
-                                          <p:spTgt spid="136"/>
-                                        </p:tgtEl>
-                                        <p:attrNameLst>
-                                          <p:attrName>style.visibility</p:attrName>
-                                        </p:attrNameLst>
-                                      </p:cBhvr>
-                                      <p:to>
-                                        <p:strVal val="visible"/>
-                                      </p:to>
-                                    </p:set>
-                                  </p:childTnLst>
-                                </p:cTn>
-                              </p:par>
-                            </p:childTnLst>
-                          </p:cTn>
-                        </p:par>
-                      </p:childTnLst>
-                    </p:cTn>
-                  </p:par>
-                  <p:par>
-                    <p:cTn id="45" fill="hold">
-                      <p:stCondLst>
-                        <p:cond delay="indefinite"/>
-                      </p:stCondLst>
-                      <p:childTnLst>
-                        <p:par>
-                          <p:cTn id="46" fill="hold">
-                            <p:stCondLst>
-                              <p:cond delay="0"/>
-                            </p:stCondLst>
-                            <p:childTnLst>
-                              <p:par>
-                                <p:cTn id="47" presetID="1" presetClass="entr" presetSubtype="0" fill="hold" nodeType="clickEffect">
+                                <p:cTn id="47" presetID="1" presetClass="entr" presetSubtype="0" fill="hold" nodeType="withEffect">
                                   <p:stCondLst>
                                     <p:cond delay="0"/>
                                   </p:stCondLst>
@@ -17355,7 +17452,7 @@
                                           </p:stCondLst>
                                         </p:cTn>
                                         <p:tgtEl>
-                                          <p:spTgt spid="45"/>
+                                          <p:spTgt spid="38"/>
                                         </p:tgtEl>
                                         <p:attrNameLst>
                                           <p:attrName>style.visibility</p:attrName>
@@ -17382,33 +17479,6 @@
                                           </p:stCondLst>
                                         </p:cTn>
                                         <p:tgtEl>
-                                          <p:spTgt spid="38"/>
-                                        </p:tgtEl>
-                                        <p:attrNameLst>
-                                          <p:attrName>style.visibility</p:attrName>
-                                        </p:attrNameLst>
-                                      </p:cBhvr>
-                                      <p:to>
-                                        <p:strVal val="visible"/>
-                                      </p:to>
-                                    </p:set>
-                                  </p:childTnLst>
-                                </p:cTn>
-                              </p:par>
-                              <p:par>
-                                <p:cTn id="51" presetID="1" presetClass="entr" presetSubtype="0" fill="hold" nodeType="withEffect">
-                                  <p:stCondLst>
-                                    <p:cond delay="0"/>
-                                  </p:stCondLst>
-                                  <p:childTnLst>
-                                    <p:set>
-                                      <p:cBhvr>
-                                        <p:cTn id="52" dur="1" fill="hold">
-                                          <p:stCondLst>
-                                            <p:cond delay="0"/>
-                                          </p:stCondLst>
-                                        </p:cTn>
-                                        <p:tgtEl>
                                           <p:spTgt spid="41"/>
                                         </p:tgtEl>
                                         <p:attrNameLst>
@@ -17423,14 +17493,14 @@
                                 </p:cTn>
                               </p:par>
                               <p:par>
-                                <p:cTn id="53" presetID="1" presetClass="entr" presetSubtype="0" fill="hold" grpId="0" nodeType="withEffect">
+                                <p:cTn id="51" presetID="1" presetClass="entr" presetSubtype="0" fill="hold" grpId="0" nodeType="withEffect">
                                   <p:stCondLst>
                                     <p:cond delay="0"/>
                                   </p:stCondLst>
                                   <p:childTnLst>
                                     <p:set>
                                       <p:cBhvr>
-                                        <p:cTn id="54" dur="1" fill="hold">
+                                        <p:cTn id="52" dur="1" fill="hold">
                                           <p:stCondLst>
                                             <p:cond delay="0"/>
                                           </p:stCondLst>
@@ -17450,14 +17520,14 @@
                                 </p:cTn>
                               </p:par>
                               <p:par>
-                                <p:cTn id="55" presetID="1" presetClass="entr" presetSubtype="0" fill="hold" nodeType="withEffect">
+                                <p:cTn id="53" presetID="1" presetClass="entr" presetSubtype="0" fill="hold" nodeType="withEffect">
                                   <p:stCondLst>
                                     <p:cond delay="0"/>
                                   </p:stCondLst>
                                   <p:childTnLst>
                                     <p:set>
                                       <p:cBhvr>
-                                        <p:cTn id="56" dur="1" fill="hold">
+                                        <p:cTn id="54" dur="1" fill="hold">
                                           <p:stCondLst>
                                             <p:cond delay="0"/>
                                           </p:stCondLst>
@@ -17483,36 +17553,32 @@
                     </p:cTn>
                   </p:par>
                   <p:par>
-                    <p:cTn id="57" fill="hold">
+                    <p:cTn id="55" fill="hold">
                       <p:stCondLst>
                         <p:cond delay="indefinite"/>
                       </p:stCondLst>
                       <p:childTnLst>
                         <p:par>
-                          <p:cTn id="58" fill="hold">
+                          <p:cTn id="56" fill="hold">
                             <p:stCondLst>
                               <p:cond delay="0"/>
                             </p:stCondLst>
                             <p:childTnLst>
                               <p:par>
-                                <p:cTn id="59" presetID="1" presetClass="entr" presetSubtype="0" fill="hold" nodeType="clickEffect">
+                                <p:cTn id="57" presetID="1" presetClass="entr" presetSubtype="0" fill="hold" grpId="0" nodeType="clickEffect">
                                   <p:stCondLst>
                                     <p:cond delay="0"/>
                                   </p:stCondLst>
                                   <p:childTnLst>
                                     <p:set>
                                       <p:cBhvr>
-                                        <p:cTn id="60" dur="1" fill="hold">
+                                        <p:cTn id="58" dur="1" fill="hold">
                                           <p:stCondLst>
                                             <p:cond delay="0"/>
                                           </p:stCondLst>
                                         </p:cTn>
                                         <p:tgtEl>
-                                          <p:spTgt spid="6">
-                                            <p:txEl>
-                                              <p:pRg st="2" end="2"/>
-                                            </p:txEl>
-                                          </p:spTgt>
+                                          <p:spTgt spid="2"/>
                                         </p:tgtEl>
                                         <p:attrNameLst>
                                           <p:attrName>style.visibility</p:attrName>
@@ -17526,24 +17592,20 @@
                                 </p:cTn>
                               </p:par>
                               <p:par>
-                                <p:cTn id="61" presetID="1" presetClass="entr" presetSubtype="0" fill="hold" nodeType="withEffect">
+                                <p:cTn id="59" presetID="1" presetClass="entr" presetSubtype="0" fill="hold" grpId="0" nodeType="withEffect">
                                   <p:stCondLst>
                                     <p:cond delay="0"/>
                                   </p:stCondLst>
                                   <p:childTnLst>
                                     <p:set>
                                       <p:cBhvr>
-                                        <p:cTn id="62" dur="1" fill="hold">
+                                        <p:cTn id="60" dur="1" fill="hold">
                                           <p:stCondLst>
                                             <p:cond delay="0"/>
                                           </p:stCondLst>
                                         </p:cTn>
                                         <p:tgtEl>
-                                          <p:spTgt spid="6">
-                                            <p:txEl>
-                                              <p:pRg st="3" end="3"/>
-                                            </p:txEl>
-                                          </p:spTgt>
+                                          <p:spTgt spid="3"/>
                                         </p:tgtEl>
                                         <p:attrNameLst>
                                           <p:attrName>style.visibility</p:attrName>
@@ -17587,6 +17649,8 @@
       <p:bldP spid="81" grpId="0" animBg="1"/>
       <p:bldP spid="85" grpId="0" animBg="1"/>
       <p:bldP spid="178" grpId="0" animBg="1"/>
+      <p:bldP spid="3" grpId="0" animBg="1"/>
+      <p:bldP spid="2" grpId="0" animBg="1"/>
     </p:bldLst>
   </p:timing>
 </p:sld>
@@ -17729,7 +17793,9 @@
             <a:ext cx="4534794" cy="5231504"/>
           </a:xfrm>
           <a:prstGeom prst="roundRect">
-            <a:avLst/>
+            <a:avLst>
+              <a:gd name="adj" fmla="val 0"/>
+            </a:avLst>
           </a:prstGeom>
           <a:solidFill>
             <a:schemeClr val="bg1">
